--- a/media/resources/EkiOrunduuOnduktar/EkiOrunduuOnduktarKoshuu3Tutashtyr (1).pptx
+++ b/media/resources/EkiOrunduuOnduktar/EkiOrunduuOnduktarKoshuu3Tutashtyr (1).pptx
@@ -7373,7 +7373,7 @@
                 <a:ea typeface="+mn-ea"/>
                 <a:cs typeface="+mn-cs"/>
               </a:rPr>
-              <a:t>Ошол команда үчүн квадратты талап кылуу үчүн жооп кутучасынын тиешелүү көлөкө тарабын чыкылдатыңыз/тийиңиз.</a:t>
+              <a:t>Ошол команданын квадратын ээлөө үчүн жооп кутучасынын боёлгон бөлүгүн басыңыз.</a:t>
             </a:r>
           </a:p>
           <a:p>
@@ -8006,7 +8006,7 @@
                             <a:schemeClr val="tx1"/>
                           </a:solidFill>
                         </a:rPr>
-                        <a:t>3.91</a:t>
+                        <a:t>3,91</a:t>
                       </a:r>
                     </a:p>
                   </a:txBody>
@@ -8078,7 +8078,7 @@
                             <a:schemeClr val="tx1"/>
                           </a:solidFill>
                         </a:rPr>
-                        <a:t>6.15</a:t>
+                        <a:t>6,15</a:t>
                       </a:r>
                     </a:p>
                   </a:txBody>
@@ -8150,7 +8150,7 @@
                             <a:schemeClr val="tx1"/>
                           </a:solidFill>
                         </a:rPr>
-                        <a:t>4.47</a:t>
+                        <a:t>4,47</a:t>
                       </a:r>
                     </a:p>
                   </a:txBody>
@@ -8206,7 +8206,7 @@
                             <a:schemeClr val="tx1"/>
                           </a:solidFill>
                         </a:rPr>
-                        <a:t>3.92</a:t>
+                        <a:t>3,92</a:t>
                       </a:r>
                     </a:p>
                   </a:txBody>
@@ -8269,7 +8269,7 @@
                             <a:schemeClr val="tx1"/>
                           </a:solidFill>
                         </a:rPr>
-                        <a:t>3.61</a:t>
+                        <a:t>3,61</a:t>
                       </a:r>
                     </a:p>
                   </a:txBody>
@@ -8325,7 +8325,7 @@
                             <a:schemeClr val="tx1"/>
                           </a:solidFill>
                         </a:rPr>
-                        <a:t>4.36</a:t>
+                        <a:t>4,36</a:t>
                       </a:r>
                     </a:p>
                   </a:txBody>
@@ -8397,7 +8397,7 @@
                             <a:schemeClr val="tx1"/>
                           </a:solidFill>
                         </a:rPr>
-                        <a:t>7.06</a:t>
+                        <a:t>7,06</a:t>
                       </a:r>
                     </a:p>
                   </a:txBody>
@@ -8453,7 +8453,7 @@
                             <a:schemeClr val="tx1"/>
                           </a:solidFill>
                         </a:rPr>
-                        <a:t>7.93</a:t>
+                        <a:t>7,93</a:t>
                       </a:r>
                     </a:p>
                   </a:txBody>
@@ -8516,7 +8516,7 @@
                             <a:schemeClr val="tx1"/>
                           </a:solidFill>
                         </a:rPr>
-                        <a:t>7.96</a:t>
+                        <a:t>7,96</a:t>
                       </a:r>
                     </a:p>
                   </a:txBody>
@@ -8572,7 +8572,7 @@
                             <a:schemeClr val="tx1"/>
                           </a:solidFill>
                         </a:rPr>
-                        <a:t>3.96</a:t>
+                        <a:t>3,96</a:t>
                       </a:r>
                     </a:p>
                   </a:txBody>
@@ -8644,7 +8644,7 @@
                             <a:schemeClr val="tx1"/>
                           </a:solidFill>
                         </a:rPr>
-                        <a:t>4.71</a:t>
+                        <a:t>4,71</a:t>
                       </a:r>
                     </a:p>
                   </a:txBody>
@@ -8700,7 +8700,7 @@
                             <a:schemeClr val="tx1"/>
                           </a:solidFill>
                         </a:rPr>
-                        <a:t>6.21</a:t>
+                        <a:t>6,21</a:t>
                       </a:r>
                     </a:p>
                   </a:txBody>
@@ -8763,7 +8763,7 @@
                             <a:schemeClr val="tx1"/>
                           </a:solidFill>
                         </a:rPr>
-                        <a:t>2.38</a:t>
+                        <a:t>2,38</a:t>
                       </a:r>
                     </a:p>
                   </a:txBody>
@@ -8819,7 +8819,7 @@
                             <a:schemeClr val="tx1"/>
                           </a:solidFill>
                         </a:rPr>
-                        <a:t>7.04</a:t>
+                        <a:t>7,04</a:t>
                       </a:r>
                     </a:p>
                   </a:txBody>
@@ -8891,7 +8891,7 @@
                             <a:schemeClr val="tx1"/>
                           </a:solidFill>
                         </a:rPr>
-                        <a:t>5.58</a:t>
+                        <a:t>5,58</a:t>
                       </a:r>
                     </a:p>
                   </a:txBody>
@@ -8947,7 +8947,7 @@
                             <a:schemeClr val="tx1"/>
                           </a:solidFill>
                         </a:rPr>
-                        <a:t>3.62</a:t>
+                        <a:t>3,62</a:t>
                       </a:r>
                     </a:p>
                   </a:txBody>
@@ -9516,7 +9516,7 @@
                           <a:latin typeface="Arial" panose="020B0604020202020204" pitchFamily="34" charset="0"/>
                           <a:cs typeface="Arial" panose="020B0604020202020204" pitchFamily="34" charset="0"/>
                         </a:rPr>
-                        <a:t>2.31 + 2.4</a:t>
+                        <a:t>2,31 + 2,4</a:t>
                       </a:r>
                     </a:p>
                   </a:txBody>
@@ -9573,7 +9573,7 @@
                           <a:latin typeface="Arial" panose="020B0604020202020204" pitchFamily="34" charset="0"/>
                           <a:cs typeface="Arial" panose="020B0604020202020204" pitchFamily="34" charset="0"/>
                         </a:rPr>
-                        <a:t>4.56 + 3.4</a:t>
+                        <a:t>4,56 + 3,4</a:t>
                       </a:r>
                     </a:p>
                   </a:txBody>
@@ -9637,7 +9637,7 @@
                           <a:latin typeface="Arial" panose="020B0604020202020204" pitchFamily="34" charset="0"/>
                           <a:cs typeface="Arial" panose="020B0604020202020204" pitchFamily="34" charset="0"/>
                         </a:rPr>
-                        <a:t> 4.3 + 1.28</a:t>
+                        <a:t> 4,3 + 1,28</a:t>
                       </a:r>
                     </a:p>
                   </a:txBody>
@@ -9694,7 +9694,7 @@
                           <a:latin typeface="Arial" panose="020B0604020202020204" pitchFamily="34" charset="0"/>
                           <a:cs typeface="Arial" panose="020B0604020202020204" pitchFamily="34" charset="0"/>
                         </a:rPr>
-                        <a:t>0.82 + 2.8</a:t>
+                        <a:t>0,82 + 2,8</a:t>
                       </a:r>
                     </a:p>
                   </a:txBody>
@@ -9758,7 +9758,7 @@
                           <a:latin typeface="Arial" panose="020B0604020202020204" pitchFamily="34" charset="0"/>
                           <a:cs typeface="Arial" panose="020B0604020202020204" pitchFamily="34" charset="0"/>
                         </a:rPr>
-                        <a:t>0.7 + 1.68</a:t>
+                        <a:t>0,7 + 1,68</a:t>
                       </a:r>
                     </a:p>
                   </a:txBody>
@@ -9815,7 +9815,7 @@
                           <a:latin typeface="Arial" panose="020B0604020202020204" pitchFamily="34" charset="0"/>
                           <a:cs typeface="Arial" panose="020B0604020202020204" pitchFamily="34" charset="0"/>
                         </a:rPr>
-                        <a:t>0.56 + 3.4</a:t>
+                        <a:t>0,56 + 3,4</a:t>
                       </a:r>
                     </a:p>
                   </a:txBody>
@@ -9879,7 +9879,7 @@
                           <a:latin typeface="Arial" panose="020B0604020202020204" pitchFamily="34" charset="0"/>
                           <a:cs typeface="Arial" panose="020B0604020202020204" pitchFamily="34" charset="0"/>
                         </a:rPr>
-                        <a:t>6.2 + 0.84</a:t>
+                        <a:t>6,2 + 0,84</a:t>
                       </a:r>
                     </a:p>
                   </a:txBody>
@@ -9936,7 +9936,7 @@
                           <a:latin typeface="Arial" panose="020B0604020202020204" pitchFamily="34" charset="0"/>
                           <a:cs typeface="Arial" panose="020B0604020202020204" pitchFamily="34" charset="0"/>
                         </a:rPr>
-                        <a:t>3.7 + 2.45</a:t>
+                        <a:t>3,7 + 2,45</a:t>
                       </a:r>
                     </a:p>
                   </a:txBody>
@@ -10000,7 +10000,7 @@
                           <a:latin typeface="Arial" panose="020B0604020202020204" pitchFamily="34" charset="0"/>
                           <a:cs typeface="Arial" panose="020B0604020202020204" pitchFamily="34" charset="0"/>
                         </a:rPr>
-                        <a:t>3.4 + 0.51</a:t>
+                        <a:t>3,4 + 0,51</a:t>
                       </a:r>
                     </a:p>
                   </a:txBody>
@@ -10057,7 +10057,7 @@
                           <a:latin typeface="Arial" panose="020B0604020202020204" pitchFamily="34" charset="0"/>
                           <a:cs typeface="Arial" panose="020B0604020202020204" pitchFamily="34" charset="0"/>
                         </a:rPr>
-                        <a:t>3.1 + 1.26</a:t>
+                        <a:t>3,1 + 1,26</a:t>
                       </a:r>
                     </a:p>
                   </a:txBody>
@@ -10121,7 +10121,7 @@
                           <a:latin typeface="Arial" panose="020B0604020202020204" pitchFamily="34" charset="0"/>
                           <a:cs typeface="Arial" panose="020B0604020202020204" pitchFamily="34" charset="0"/>
                         </a:rPr>
-                        <a:t>2.01 + 1.6</a:t>
+                        <a:t>2,01 + 1,6</a:t>
                       </a:r>
                     </a:p>
                   </a:txBody>
@@ -10178,7 +10178,7 @@
                           <a:latin typeface="Arial" panose="020B0604020202020204" pitchFamily="34" charset="0"/>
                           <a:cs typeface="Arial" panose="020B0604020202020204" pitchFamily="34" charset="0"/>
                         </a:rPr>
-                        <a:t>1.8 + 2.67</a:t>
+                        <a:t>1,8 + 2,67</a:t>
                       </a:r>
                     </a:p>
                   </a:txBody>
@@ -10242,7 +10242,7 @@
                           <a:latin typeface="Arial" panose="020B0604020202020204" pitchFamily="34" charset="0"/>
                           <a:cs typeface="Arial" panose="020B0604020202020204" pitchFamily="34" charset="0"/>
                         </a:rPr>
-                        <a:t>2.2 + 1.72</a:t>
+                        <a:t>2,2 + 1,72</a:t>
                       </a:r>
                     </a:p>
                   </a:txBody>
@@ -10299,7 +10299,7 @@
                           <a:latin typeface="Arial" panose="020B0604020202020204" pitchFamily="34" charset="0"/>
                           <a:cs typeface="Arial" panose="020B0604020202020204" pitchFamily="34" charset="0"/>
                         </a:rPr>
-                        <a:t>4.7 + 3.23</a:t>
+                        <a:t>4,7 + 3,23</a:t>
                       </a:r>
                     </a:p>
                   </a:txBody>
@@ -10363,7 +10363,7 @@
                           <a:latin typeface="Arial" panose="020B0604020202020204" pitchFamily="34" charset="0"/>
                           <a:cs typeface="Arial" panose="020B0604020202020204" pitchFamily="34" charset="0"/>
                         </a:rPr>
-                        <a:t>4.91 + 1.3</a:t>
+                        <a:t>4,91 + 1,3</a:t>
                       </a:r>
                     </a:p>
                   </a:txBody>
@@ -10420,7 +10420,7 @@
                           <a:latin typeface="Arial" panose="020B0604020202020204" pitchFamily="34" charset="0"/>
                           <a:cs typeface="Arial" panose="020B0604020202020204" pitchFamily="34" charset="0"/>
                         </a:rPr>
-                        <a:t>4.8 + 2.26</a:t>
+                        <a:t>4,8 + 2,26</a:t>
                       </a:r>
                     </a:p>
                   </a:txBody>
